--- a/Ch13_New_Styles.pptx
+++ b/Ch13_New_Styles.pptx
@@ -3672,7 +3672,7 @@
                   </a:extLst>
                 </a:hlinkClick>
               </a:rPr>
-              <a:t>https://www.youtube.com/watch?v=8elXHf0gXTM</a:t>
+              <a:t>https://www.youtube.com/watch?v=bKTQQ28sSNo</a:t>
             </a:r>
             <a:endParaRPr lang="en-US" sz="1800" dirty="0"/>
           </a:p>
@@ -4790,7 +4790,7 @@
                   </a:extLst>
                 </a:hlinkClick>
               </a:rPr>
-              <a:t>https://www.youtube.com/watch?v=urqSFnKGjIQ</a:t>
+              <a:t>https://www.youtube.com/watch?v=s-DaH6zpLjs</a:t>
             </a:r>
             <a:endParaRPr lang="en-US" sz="1800" dirty="0"/>
           </a:p>
@@ -6318,7 +6318,7 @@
                   </a:extLst>
                 </a:hlinkClick>
               </a:rPr>
-              <a:t>https://www.youtube.com/watch?v=Q3T9pinGCrM</a:t>
+              <a:t>https://www.youtube.com/watch?v=020L1rGjnng</a:t>
             </a:r>
             <a:endParaRPr lang="en-US" sz="1600" dirty="0"/>
           </a:p>
